--- a/oil_boiler_heating.pptx
+++ b/oil_boiler_heating.pptx
@@ -263,7 +263,7 @@
           <a:lstStyle/>
           <a:p>
             <a:fld id="{5F491023-0B0A-7041-9F06-D25A50EF063B}" type="datetimeFigureOut">
-              <a:t>11/27/22</a:t>
+              <a:t>11/28/22</a:t>
             </a:fld>
             <a:endParaRPr lang="en-US"/>
           </a:p>
@@ -459,7 +459,7 @@
           <a:lstStyle/>
           <a:p>
             <a:fld id="{5F491023-0B0A-7041-9F06-D25A50EF063B}" type="datetimeFigureOut">
-              <a:t>11/27/22</a:t>
+              <a:t>11/28/22</a:t>
             </a:fld>
             <a:endParaRPr lang="en-US"/>
           </a:p>
@@ -665,7 +665,7 @@
           <a:lstStyle/>
           <a:p>
             <a:fld id="{5F491023-0B0A-7041-9F06-D25A50EF063B}" type="datetimeFigureOut">
-              <a:t>11/27/22</a:t>
+              <a:t>11/28/22</a:t>
             </a:fld>
             <a:endParaRPr lang="en-US"/>
           </a:p>
@@ -861,7 +861,7 @@
           <a:lstStyle/>
           <a:p>
             <a:fld id="{5F491023-0B0A-7041-9F06-D25A50EF063B}" type="datetimeFigureOut">
-              <a:t>11/27/22</a:t>
+              <a:t>11/28/22</a:t>
             </a:fld>
             <a:endParaRPr lang="en-US"/>
           </a:p>
@@ -1134,7 +1134,7 @@
           <a:lstStyle/>
           <a:p>
             <a:fld id="{5F491023-0B0A-7041-9F06-D25A50EF063B}" type="datetimeFigureOut">
-              <a:t>11/27/22</a:t>
+              <a:t>11/28/22</a:t>
             </a:fld>
             <a:endParaRPr lang="en-US"/>
           </a:p>
@@ -1397,7 +1397,7 @@
           <a:lstStyle/>
           <a:p>
             <a:fld id="{5F491023-0B0A-7041-9F06-D25A50EF063B}" type="datetimeFigureOut">
-              <a:t>11/27/22</a:t>
+              <a:t>11/28/22</a:t>
             </a:fld>
             <a:endParaRPr lang="en-US"/>
           </a:p>
@@ -1807,7 +1807,7 @@
           <a:lstStyle/>
           <a:p>
             <a:fld id="{5F491023-0B0A-7041-9F06-D25A50EF063B}" type="datetimeFigureOut">
-              <a:t>11/27/22</a:t>
+              <a:t>11/28/22</a:t>
             </a:fld>
             <a:endParaRPr lang="en-US"/>
           </a:p>
@@ -1946,7 +1946,7 @@
           <a:lstStyle/>
           <a:p>
             <a:fld id="{5F491023-0B0A-7041-9F06-D25A50EF063B}" type="datetimeFigureOut">
-              <a:t>11/27/22</a:t>
+              <a:t>11/28/22</a:t>
             </a:fld>
             <a:endParaRPr lang="en-US"/>
           </a:p>
@@ -2057,7 +2057,7 @@
           <a:lstStyle/>
           <a:p>
             <a:fld id="{5F491023-0B0A-7041-9F06-D25A50EF063B}" type="datetimeFigureOut">
-              <a:t>11/27/22</a:t>
+              <a:t>11/28/22</a:t>
             </a:fld>
             <a:endParaRPr lang="en-US"/>
           </a:p>
@@ -2366,7 +2366,7 @@
           <a:lstStyle/>
           <a:p>
             <a:fld id="{5F491023-0B0A-7041-9F06-D25A50EF063B}" type="datetimeFigureOut">
-              <a:t>11/27/22</a:t>
+              <a:t>11/28/22</a:t>
             </a:fld>
             <a:endParaRPr lang="en-US"/>
           </a:p>
@@ -2652,7 +2652,7 @@
           <a:lstStyle/>
           <a:p>
             <a:fld id="{5F491023-0B0A-7041-9F06-D25A50EF063B}" type="datetimeFigureOut">
-              <a:t>11/27/22</a:t>
+              <a:t>11/28/22</a:t>
             </a:fld>
             <a:endParaRPr lang="en-US"/>
           </a:p>
@@ -2891,7 +2891,7 @@
           </a:lstStyle>
           <a:p>
             <a:fld id="{5F491023-0B0A-7041-9F06-D25A50EF063B}" type="datetimeFigureOut">
-              <a:t>11/27/22</a:t>
+              <a:t>11/28/22</a:t>
             </a:fld>
             <a:endParaRPr lang="en-US"/>
           </a:p>
@@ -16590,6 +16590,135 @@
           </a:p>
         </p:txBody>
       </p:sp>
+      <p:sp>
+        <p:nvSpPr>
+          <p:cNvPr id="3" name="TextBox 2">
+            <a:extLst>
+              <a:ext uri="{FF2B5EF4-FFF2-40B4-BE49-F238E27FC236}">
+                <a16:creationId xmlns:a16="http://schemas.microsoft.com/office/drawing/2014/main" id="{6120064D-9ACB-2FC4-18DE-777EBE1F8EAC}"/>
+              </a:ext>
+            </a:extLst>
+          </p:cNvPr>
+          <p:cNvSpPr txBox="1"/>
+          <p:nvPr/>
+        </p:nvSpPr>
+        <p:spPr>
+          <a:xfrm>
+            <a:off x="7890710" y="3555698"/>
+            <a:ext cx="4142220" cy="2000548"/>
+          </a:xfrm>
+          <a:prstGeom prst="rect">
+            <a:avLst/>
+          </a:prstGeom>
+          <a:noFill/>
+        </p:spPr>
+        <p:txBody>
+          <a:bodyPr wrap="square" rtlCol="0">
+            <a:spAutoFit/>
+          </a:bodyPr>
+          <a:lstStyle/>
+          <a:p>
+            <a:r>
+              <a:rPr lang="en-US" b="1" dirty="0">
+                <a:solidFill>
+                  <a:srgbClr val="00B050"/>
+                </a:solidFill>
+              </a:rPr>
+              <a:t>Compatibility:</a:t>
+            </a:r>
+            <a:br>
+              <a:rPr lang="en-US" sz="1400" dirty="0"/>
+            </a:br>
+            <a:r>
+              <a:rPr lang="en-US" sz="1100" dirty="0"/>
+              <a:t>.. </a:t>
+            </a:r>
+            <a:r>
+              <a:rPr lang="en-US" sz="1100" dirty="0">
+                <a:hlinkClick r:id="rId8"/>
+              </a:rPr>
+              <a:t>https://</a:t>
+            </a:r>
+            <a:r>
+              <a:rPr lang="en-US" sz="1100" dirty="0" err="1">
+                <a:hlinkClick r:id="rId8"/>
+              </a:rPr>
+              <a:t>store.google.com</a:t>
+            </a:r>
+            <a:r>
+              <a:rPr lang="en-US" sz="1100" dirty="0">
+                <a:hlinkClick r:id="rId8"/>
+              </a:rPr>
+              <a:t>/us/widget/compatibility/thermostat</a:t>
+            </a:r>
+            <a:endParaRPr lang="en-US" sz="1100" dirty="0"/>
+          </a:p>
+          <a:p>
+            <a:pPr marL="285750" indent="-285750">
+              <a:buFont typeface="Arial" panose="020B0604020202020204" pitchFamily="34" charset="0"/>
+              <a:buChar char="•"/>
+            </a:pPr>
+            <a:r>
+              <a:rPr lang="en-US" sz="1400" dirty="0"/>
+              <a:t>Google Nest thermostats are designed to work </a:t>
+            </a:r>
+            <a:br>
+              <a:rPr lang="en-US" sz="1400" dirty="0"/>
+            </a:br>
+            <a:r>
+              <a:rPr lang="en-US" sz="1400" dirty="0"/>
+              <a:t>with most 24 V systems, even older systems</a:t>
+            </a:r>
+          </a:p>
+          <a:p>
+            <a:pPr marL="285750" indent="-285750">
+              <a:buFont typeface="Arial" panose="020B0604020202020204" pitchFamily="34" charset="0"/>
+              <a:buChar char="•"/>
+            </a:pPr>
+            <a:r>
+              <a:rPr lang="en-US" sz="1400" dirty="0"/>
+              <a:t>Online Compatibility Checker:</a:t>
+            </a:r>
+            <a:br>
+              <a:rPr lang="en-US" sz="1400" dirty="0"/>
+            </a:br>
+            <a:r>
+              <a:rPr lang="en-US" sz="1100" dirty="0"/>
+              <a:t>.. </a:t>
+            </a:r>
+            <a:r>
+              <a:rPr lang="en-US" sz="1100" dirty="0">
+                <a:hlinkClick r:id="rId9"/>
+              </a:rPr>
+              <a:t>https://support.google.com/googlenest/answer/9246656</a:t>
+            </a:r>
+            <a:r>
+              <a:rPr lang="en-US" sz="1100" dirty="0"/>
+              <a:t>  </a:t>
+            </a:r>
+          </a:p>
+          <a:p>
+            <a:pPr marL="171450" indent="-171450">
+              <a:buFont typeface="Arial" panose="020B0604020202020204" pitchFamily="34" charset="0"/>
+              <a:buChar char="•"/>
+            </a:pPr>
+            <a:r>
+              <a:rPr lang="en-US" sz="1400" dirty="0"/>
+              <a:t>Nest Learning Thermostat is more compatible</a:t>
+            </a:r>
+          </a:p>
+          <a:p>
+            <a:pPr marL="171450" indent="-171450">
+              <a:buFont typeface="Arial" panose="020B0604020202020204" pitchFamily="34" charset="0"/>
+              <a:buChar char="•"/>
+            </a:pPr>
+            <a:r>
+              <a:rPr lang="en-US" sz="1400" dirty="0"/>
+              <a:t>Regular Nest Thermostat may need C wire or Nest Power Connector</a:t>
+            </a:r>
+          </a:p>
+        </p:txBody>
+      </p:sp>
     </p:spTree>
     <p:extLst>
       <p:ext uri="{BB962C8B-B14F-4D97-AF65-F5344CB8AC3E}">

--- a/oil_boiler_heating.pptx
+++ b/oil_boiler_heating.pptx
@@ -263,7 +263,7 @@
           <a:lstStyle/>
           <a:p>
             <a:fld id="{5F491023-0B0A-7041-9F06-D25A50EF063B}" type="datetimeFigureOut">
-              <a:t>11/28/22</a:t>
+              <a:t>1/7/23</a:t>
             </a:fld>
             <a:endParaRPr lang="en-US"/>
           </a:p>
@@ -459,7 +459,7 @@
           <a:lstStyle/>
           <a:p>
             <a:fld id="{5F491023-0B0A-7041-9F06-D25A50EF063B}" type="datetimeFigureOut">
-              <a:t>11/28/22</a:t>
+              <a:t>1/7/23</a:t>
             </a:fld>
             <a:endParaRPr lang="en-US"/>
           </a:p>
@@ -665,7 +665,7 @@
           <a:lstStyle/>
           <a:p>
             <a:fld id="{5F491023-0B0A-7041-9F06-D25A50EF063B}" type="datetimeFigureOut">
-              <a:t>11/28/22</a:t>
+              <a:t>1/7/23</a:t>
             </a:fld>
             <a:endParaRPr lang="en-US"/>
           </a:p>
@@ -861,7 +861,7 @@
           <a:lstStyle/>
           <a:p>
             <a:fld id="{5F491023-0B0A-7041-9F06-D25A50EF063B}" type="datetimeFigureOut">
-              <a:t>11/28/22</a:t>
+              <a:t>1/7/23</a:t>
             </a:fld>
             <a:endParaRPr lang="en-US"/>
           </a:p>
@@ -1134,7 +1134,7 @@
           <a:lstStyle/>
           <a:p>
             <a:fld id="{5F491023-0B0A-7041-9F06-D25A50EF063B}" type="datetimeFigureOut">
-              <a:t>11/28/22</a:t>
+              <a:t>1/7/23</a:t>
             </a:fld>
             <a:endParaRPr lang="en-US"/>
           </a:p>
@@ -1397,7 +1397,7 @@
           <a:lstStyle/>
           <a:p>
             <a:fld id="{5F491023-0B0A-7041-9F06-D25A50EF063B}" type="datetimeFigureOut">
-              <a:t>11/28/22</a:t>
+              <a:t>1/7/23</a:t>
             </a:fld>
             <a:endParaRPr lang="en-US"/>
           </a:p>
@@ -1807,7 +1807,7 @@
           <a:lstStyle/>
           <a:p>
             <a:fld id="{5F491023-0B0A-7041-9F06-D25A50EF063B}" type="datetimeFigureOut">
-              <a:t>11/28/22</a:t>
+              <a:t>1/7/23</a:t>
             </a:fld>
             <a:endParaRPr lang="en-US"/>
           </a:p>
@@ -1946,7 +1946,7 @@
           <a:lstStyle/>
           <a:p>
             <a:fld id="{5F491023-0B0A-7041-9F06-D25A50EF063B}" type="datetimeFigureOut">
-              <a:t>11/28/22</a:t>
+              <a:t>1/7/23</a:t>
             </a:fld>
             <a:endParaRPr lang="en-US"/>
           </a:p>
@@ -2057,7 +2057,7 @@
           <a:lstStyle/>
           <a:p>
             <a:fld id="{5F491023-0B0A-7041-9F06-D25A50EF063B}" type="datetimeFigureOut">
-              <a:t>11/28/22</a:t>
+              <a:t>1/7/23</a:t>
             </a:fld>
             <a:endParaRPr lang="en-US"/>
           </a:p>
@@ -2366,7 +2366,7 @@
           <a:lstStyle/>
           <a:p>
             <a:fld id="{5F491023-0B0A-7041-9F06-D25A50EF063B}" type="datetimeFigureOut">
-              <a:t>11/28/22</a:t>
+              <a:t>1/7/23</a:t>
             </a:fld>
             <a:endParaRPr lang="en-US"/>
           </a:p>
@@ -2652,7 +2652,7 @@
           <a:lstStyle/>
           <a:p>
             <a:fld id="{5F491023-0B0A-7041-9F06-D25A50EF063B}" type="datetimeFigureOut">
-              <a:t>11/28/22</a:t>
+              <a:t>1/7/23</a:t>
             </a:fld>
             <a:endParaRPr lang="en-US"/>
           </a:p>
@@ -2891,7 +2891,7 @@
           </a:lstStyle>
           <a:p>
             <a:fld id="{5F491023-0B0A-7041-9F06-D25A50EF063B}" type="datetimeFigureOut">
-              <a:t>11/28/22</a:t>
+              <a:t>1/7/23</a:t>
             </a:fld>
             <a:endParaRPr lang="en-US"/>
           </a:p>
@@ -3321,7 +3321,7 @@
         </p:nvSpPr>
         <p:spPr>
           <a:xfrm>
-            <a:off x="0" y="0"/>
+            <a:off x="30921" y="0"/>
             <a:ext cx="3379304" cy="523220"/>
           </a:xfrm>
           <a:prstGeom prst="rect">
@@ -3336,7 +3336,7 @@
           <a:lstStyle/>
           <a:p>
             <a:r>
-              <a:rPr lang="en-US" sz="2800" b="1"/>
+              <a:rPr lang="en-US" sz="2800" b="1" dirty="0"/>
               <a:t>Oil - 550 Gallon Tank</a:t>
             </a:r>
           </a:p>
@@ -3470,7 +3470,7 @@
           <a:p>
             <a:r>
               <a:rPr lang="en-US" sz="1200" dirty="0"/>
-              <a:t>Owner: Casey Milk</a:t>
+              <a:t>Owner  wife: Casey Milk</a:t>
             </a:r>
           </a:p>
           <a:p>
@@ -3661,7 +3661,7 @@
         <p:spPr>
           <a:xfrm>
             <a:off x="121480" y="2814746"/>
-            <a:ext cx="2216368" cy="461665"/>
+            <a:ext cx="3136345" cy="1015663"/>
           </a:xfrm>
           <a:prstGeom prst="rect">
             <a:avLst/>
@@ -3686,14 +3686,32 @@
           <a:p>
             <a:r>
               <a:rPr lang="en-US" sz="1200" dirty="0"/>
-              <a:t>2022-07-06: 150 gal ($5.79/gal)</a:t>
+              <a:t>2022-07-06: ordered 150 gal ($5.79/gal)</a:t>
             </a:r>
             <a:br>
               <a:rPr lang="en-US" sz="1200" dirty="0"/>
             </a:br>
             <a:r>
               <a:rPr lang="en-US" sz="1200" dirty="0"/>
-              <a:t>2022-11-22: 150 gal ($5.59/gal)</a:t>
+              <a:t>2022-11-22: ordered 150 gal ($5.59/gal)</a:t>
+            </a:r>
+          </a:p>
+          <a:p>
+            <a:r>
+              <a:rPr lang="en-US" sz="1200" dirty="0"/>
+              <a:t>Gauge reading: 1/4 = 108 Gal </a:t>
+            </a:r>
+          </a:p>
+          <a:p>
+            <a:r>
+              <a:rPr lang="en-US" sz="1200" dirty="0"/>
+              <a:t>2023-01-07: ordered 150 gal ($4.29/gal)</a:t>
+            </a:r>
+          </a:p>
+          <a:p>
+            <a:r>
+              <a:rPr lang="en-US" sz="1200" dirty="0"/>
+              <a:t>Gage new reading should be close to 1/2 </a:t>
             </a:r>
           </a:p>
         </p:txBody>
@@ -4147,7 +4165,7 @@
                     <a:p>
                       <a:pPr algn="ctr" rtl="0" fontAlgn="b"/>
                       <a:r>
-                        <a:rPr lang="en-US" sz="1100">
+                        <a:rPr lang="en-US" sz="1100" dirty="0">
                           <a:effectLst/>
                         </a:rPr>
                         <a:t>inch</a:t>
@@ -15123,6 +15141,42 @@
           <a:xfrm>
             <a:off x="76842" y="4101599"/>
             <a:ext cx="1446709" cy="1631809"/>
+          </a:xfrm>
+          <a:prstGeom prst="rect">
+            <a:avLst/>
+          </a:prstGeom>
+        </p:spPr>
+      </p:pic>
+      <p:pic>
+        <p:nvPicPr>
+          <p:cNvPr id="3" name="Picture 2">
+            <a:extLst>
+              <a:ext uri="{FF2B5EF4-FFF2-40B4-BE49-F238E27FC236}">
+                <a16:creationId xmlns:a16="http://schemas.microsoft.com/office/drawing/2014/main" id="{F5DEDC02-E272-C9C2-2573-659456400A60}"/>
+              </a:ext>
+            </a:extLst>
+          </p:cNvPr>
+          <p:cNvPicPr>
+            <a:picLocks noChangeAspect="1"/>
+          </p:cNvPicPr>
+          <p:nvPr/>
+        </p:nvPicPr>
+        <p:blipFill>
+          <a:blip r:embed="rId9" cstate="email">
+            <a:extLst>
+              <a:ext uri="{28A0092B-C50C-407E-A947-70E740481C1C}">
+                <a14:useLocalDpi xmlns:a14="http://schemas.microsoft.com/office/drawing/2010/main"/>
+              </a:ext>
+            </a:extLst>
+          </a:blip>
+          <a:stretch>
+            <a:fillRect/>
+          </a:stretch>
+        </p:blipFill>
+        <p:spPr>
+          <a:xfrm>
+            <a:off x="4945627" y="198151"/>
+            <a:ext cx="2382909" cy="3076833"/>
           </a:xfrm>
           <a:prstGeom prst="rect">
             <a:avLst/>

--- a/oil_boiler_heating.pptx
+++ b/oil_boiler_heating.pptx
@@ -5,17 +5,19 @@
     <p:sldMasterId id="2147483648" r:id="rId1"/>
   </p:sldMasterIdLst>
   <p:notesMasterIdLst>
-    <p:notesMasterId r:id="rId10"/>
+    <p:notesMasterId r:id="rId12"/>
   </p:notesMasterIdLst>
   <p:sldIdLst>
     <p:sldId id="256" r:id="rId2"/>
     <p:sldId id="257" r:id="rId3"/>
     <p:sldId id="258" r:id="rId4"/>
-    <p:sldId id="261" r:id="rId5"/>
-    <p:sldId id="259" r:id="rId6"/>
-    <p:sldId id="260" r:id="rId7"/>
-    <p:sldId id="262" r:id="rId8"/>
-    <p:sldId id="263" r:id="rId9"/>
+    <p:sldId id="265" r:id="rId5"/>
+    <p:sldId id="261" r:id="rId6"/>
+    <p:sldId id="259" r:id="rId7"/>
+    <p:sldId id="260" r:id="rId8"/>
+    <p:sldId id="262" r:id="rId9"/>
+    <p:sldId id="263" r:id="rId10"/>
+    <p:sldId id="264" r:id="rId11"/>
   </p:sldIdLst>
   <p:sldSz cx="12192000" cy="6858000"/>
   <p:notesSz cx="6858000" cy="9144000"/>
@@ -204,7 +206,7 @@
           <a:p>
             <a:fld id="{41ADE972-A30E-EB4D-8E6E-AA4C5D685F81}" type="datetimeFigureOut">
               <a:rPr lang="en-US" smtClean="0"/>
-              <a:t>8/16/23</a:t>
+              <a:t>12/28/23</a:t>
             </a:fld>
             <a:endParaRPr lang="en-US"/>
           </a:p>
@@ -536,7 +538,7 @@
           <a:p>
             <a:fld id="{5798E7CD-ECDC-AF4F-BE57-C5F612713F5B}" type="slidenum">
               <a:rPr lang="en-US" smtClean="0"/>
-              <a:t>7</a:t>
+              <a:t>8</a:t>
             </a:fld>
             <a:endParaRPr lang="en-US"/>
           </a:p>
@@ -620,7 +622,7 @@
           <a:p>
             <a:fld id="{5798E7CD-ECDC-AF4F-BE57-C5F612713F5B}" type="slidenum">
               <a:rPr lang="en-US" smtClean="0"/>
-              <a:t>8</a:t>
+              <a:t>9</a:t>
             </a:fld>
             <a:endParaRPr lang="en-US"/>
           </a:p>
@@ -785,7 +787,7 @@
           <a:lstStyle/>
           <a:p>
             <a:fld id="{5F491023-0B0A-7041-9F06-D25A50EF063B}" type="datetimeFigureOut">
-              <a:t>8/16/23</a:t>
+              <a:t>12/28/23</a:t>
             </a:fld>
             <a:endParaRPr lang="en-US"/>
           </a:p>
@@ -981,7 +983,7 @@
           <a:lstStyle/>
           <a:p>
             <a:fld id="{5F491023-0B0A-7041-9F06-D25A50EF063B}" type="datetimeFigureOut">
-              <a:t>8/16/23</a:t>
+              <a:t>12/28/23</a:t>
             </a:fld>
             <a:endParaRPr lang="en-US"/>
           </a:p>
@@ -1187,7 +1189,7 @@
           <a:lstStyle/>
           <a:p>
             <a:fld id="{5F491023-0B0A-7041-9F06-D25A50EF063B}" type="datetimeFigureOut">
-              <a:t>8/16/23</a:t>
+              <a:t>12/28/23</a:t>
             </a:fld>
             <a:endParaRPr lang="en-US"/>
           </a:p>
@@ -1383,7 +1385,7 @@
           <a:lstStyle/>
           <a:p>
             <a:fld id="{5F491023-0B0A-7041-9F06-D25A50EF063B}" type="datetimeFigureOut">
-              <a:t>8/16/23</a:t>
+              <a:t>12/28/23</a:t>
             </a:fld>
             <a:endParaRPr lang="en-US"/>
           </a:p>
@@ -1656,7 +1658,7 @@
           <a:lstStyle/>
           <a:p>
             <a:fld id="{5F491023-0B0A-7041-9F06-D25A50EF063B}" type="datetimeFigureOut">
-              <a:t>8/16/23</a:t>
+              <a:t>12/28/23</a:t>
             </a:fld>
             <a:endParaRPr lang="en-US"/>
           </a:p>
@@ -1919,7 +1921,7 @@
           <a:lstStyle/>
           <a:p>
             <a:fld id="{5F491023-0B0A-7041-9F06-D25A50EF063B}" type="datetimeFigureOut">
-              <a:t>8/16/23</a:t>
+              <a:t>12/28/23</a:t>
             </a:fld>
             <a:endParaRPr lang="en-US"/>
           </a:p>
@@ -2329,7 +2331,7 @@
           <a:lstStyle/>
           <a:p>
             <a:fld id="{5F491023-0B0A-7041-9F06-D25A50EF063B}" type="datetimeFigureOut">
-              <a:t>8/16/23</a:t>
+              <a:t>12/28/23</a:t>
             </a:fld>
             <a:endParaRPr lang="en-US"/>
           </a:p>
@@ -2468,7 +2470,7 @@
           <a:lstStyle/>
           <a:p>
             <a:fld id="{5F491023-0B0A-7041-9F06-D25A50EF063B}" type="datetimeFigureOut">
-              <a:t>8/16/23</a:t>
+              <a:t>12/28/23</a:t>
             </a:fld>
             <a:endParaRPr lang="en-US"/>
           </a:p>
@@ -2579,7 +2581,7 @@
           <a:lstStyle/>
           <a:p>
             <a:fld id="{5F491023-0B0A-7041-9F06-D25A50EF063B}" type="datetimeFigureOut">
-              <a:t>8/16/23</a:t>
+              <a:t>12/28/23</a:t>
             </a:fld>
             <a:endParaRPr lang="en-US"/>
           </a:p>
@@ -2888,7 +2890,7 @@
           <a:lstStyle/>
           <a:p>
             <a:fld id="{5F491023-0B0A-7041-9F06-D25A50EF063B}" type="datetimeFigureOut">
-              <a:t>8/16/23</a:t>
+              <a:t>12/28/23</a:t>
             </a:fld>
             <a:endParaRPr lang="en-US"/>
           </a:p>
@@ -3174,7 +3176,7 @@
           <a:lstStyle/>
           <a:p>
             <a:fld id="{5F491023-0B0A-7041-9F06-D25A50EF063B}" type="datetimeFigureOut">
-              <a:t>8/16/23</a:t>
+              <a:t>12/28/23</a:t>
             </a:fld>
             <a:endParaRPr lang="en-US"/>
           </a:p>
@@ -3413,7 +3415,7 @@
           </a:lstStyle>
           <a:p>
             <a:fld id="{5F491023-0B0A-7041-9F06-D25A50EF063B}" type="datetimeFigureOut">
-              <a:t>8/16/23</a:t>
+              <a:t>12/28/23</a:t>
             </a:fld>
             <a:endParaRPr lang="en-US"/>
           </a:p>
@@ -4582,6 +4584,389 @@
 </p:sld>
 </file>
 
+<file path=ppt/slides/slide10.xml><?xml version="1.0" encoding="utf-8"?>
+<p:sld xmlns:a="http://schemas.openxmlformats.org/drawingml/2006/main" xmlns:r="http://schemas.openxmlformats.org/officeDocument/2006/relationships" xmlns:p="http://schemas.openxmlformats.org/presentationml/2006/main">
+  <p:cSld>
+    <p:spTree>
+      <p:nvGrpSpPr>
+        <p:cNvPr id="1" name=""/>
+        <p:cNvGrpSpPr/>
+        <p:nvPr/>
+      </p:nvGrpSpPr>
+      <p:grpSpPr>
+        <a:xfrm>
+          <a:off x="0" y="0"/>
+          <a:ext cx="0" cy="0"/>
+          <a:chOff x="0" y="0"/>
+          <a:chExt cx="0" cy="0"/>
+        </a:xfrm>
+      </p:grpSpPr>
+      <p:sp>
+        <p:nvSpPr>
+          <p:cNvPr id="3" name="TextBox 2">
+            <a:extLst>
+              <a:ext uri="{FF2B5EF4-FFF2-40B4-BE49-F238E27FC236}">
+                <a16:creationId xmlns:a16="http://schemas.microsoft.com/office/drawing/2014/main" id="{4F86FB1C-19B3-9197-5B00-6BCCEDE90772}"/>
+              </a:ext>
+            </a:extLst>
+          </p:cNvPr>
+          <p:cNvSpPr txBox="1"/>
+          <p:nvPr/>
+        </p:nvSpPr>
+        <p:spPr>
+          <a:xfrm>
+            <a:off x="83820" y="80510"/>
+            <a:ext cx="5192268" cy="461665"/>
+          </a:xfrm>
+          <a:prstGeom prst="rect">
+            <a:avLst/>
+          </a:prstGeom>
+          <a:noFill/>
+        </p:spPr>
+        <p:txBody>
+          <a:bodyPr wrap="square">
+            <a:spAutoFit/>
+          </a:bodyPr>
+          <a:lstStyle/>
+          <a:p>
+            <a:r>
+              <a:rPr lang="en-US" sz="2400" b="1" dirty="0" err="1"/>
+              <a:t>SuperStor</a:t>
+            </a:r>
+            <a:r>
+              <a:rPr lang="en-US" sz="2400" b="1" dirty="0"/>
+              <a:t> ULTRA water heater </a:t>
+            </a:r>
+          </a:p>
+        </p:txBody>
+      </p:sp>
+      <p:sp>
+        <p:nvSpPr>
+          <p:cNvPr id="5" name="TextBox 4">
+            <a:extLst>
+              <a:ext uri="{FF2B5EF4-FFF2-40B4-BE49-F238E27FC236}">
+                <a16:creationId xmlns:a16="http://schemas.microsoft.com/office/drawing/2014/main" id="{441434CB-B889-6AEF-F850-EC4180C9C785}"/>
+              </a:ext>
+            </a:extLst>
+          </p:cNvPr>
+          <p:cNvSpPr txBox="1"/>
+          <p:nvPr/>
+        </p:nvSpPr>
+        <p:spPr>
+          <a:xfrm>
+            <a:off x="2082546" y="5346115"/>
+            <a:ext cx="2733294" cy="1169551"/>
+          </a:xfrm>
+          <a:prstGeom prst="rect">
+            <a:avLst/>
+          </a:prstGeom>
+          <a:noFill/>
+        </p:spPr>
+        <p:txBody>
+          <a:bodyPr wrap="square">
+            <a:spAutoFit/>
+          </a:bodyPr>
+          <a:lstStyle/>
+          <a:p>
+            <a:r>
+              <a:rPr lang="en-US" sz="1400" b="0" i="0" dirty="0">
+                <a:solidFill>
+                  <a:srgbClr val="001D35"/>
+                </a:solidFill>
+                <a:effectLst/>
+                <a:latin typeface="Google Sans"/>
+              </a:rPr>
+              <a:t>Indirect water heaters – uses h</a:t>
+            </a:r>
+            <a:r>
+              <a:rPr lang="en-US" sz="1400" dirty="0">
+                <a:solidFill>
+                  <a:srgbClr val="001D35"/>
+                </a:solidFill>
+                <a:latin typeface="Google Sans"/>
+              </a:rPr>
+              <a:t>ot water from boiler going through</a:t>
+            </a:r>
+          </a:p>
+          <a:p>
+            <a:r>
+              <a:rPr lang="en-US" sz="1400" dirty="0">
+                <a:solidFill>
+                  <a:srgbClr val="001D35"/>
+                </a:solidFill>
+                <a:latin typeface="Google Sans"/>
+              </a:rPr>
+              <a:t>the coil to heat the tank.</a:t>
+            </a:r>
+          </a:p>
+          <a:p>
+            <a:r>
+              <a:rPr lang="en-US" sz="1400" dirty="0">
+                <a:solidFill>
+                  <a:srgbClr val="001D35"/>
+                </a:solidFill>
+                <a:latin typeface="Google Sans"/>
+              </a:rPr>
+              <a:t>Has its own thermostat.</a:t>
+            </a:r>
+          </a:p>
+          <a:p>
+            <a:r>
+              <a:rPr lang="en-US" sz="1400" dirty="0">
+                <a:solidFill>
+                  <a:srgbClr val="001D35"/>
+                </a:solidFill>
+                <a:latin typeface="Google Sans"/>
+              </a:rPr>
+              <a:t>Has good thermal insulation.</a:t>
+            </a:r>
+          </a:p>
+        </p:txBody>
+      </p:sp>
+      <p:sp>
+        <p:nvSpPr>
+          <p:cNvPr id="7" name="TextBox 6">
+            <a:extLst>
+              <a:ext uri="{FF2B5EF4-FFF2-40B4-BE49-F238E27FC236}">
+                <a16:creationId xmlns:a16="http://schemas.microsoft.com/office/drawing/2014/main" id="{BAA38790-5624-AF4D-0C84-4DADF35C9A2E}"/>
+              </a:ext>
+            </a:extLst>
+          </p:cNvPr>
+          <p:cNvSpPr txBox="1"/>
+          <p:nvPr/>
+        </p:nvSpPr>
+        <p:spPr>
+          <a:xfrm>
+            <a:off x="83820" y="542175"/>
+            <a:ext cx="4812030" cy="307777"/>
+          </a:xfrm>
+          <a:prstGeom prst="rect">
+            <a:avLst/>
+          </a:prstGeom>
+          <a:noFill/>
+        </p:spPr>
+        <p:txBody>
+          <a:bodyPr wrap="square">
+            <a:spAutoFit/>
+          </a:bodyPr>
+          <a:lstStyle/>
+          <a:p>
+            <a:r>
+              <a:rPr lang="en-US" sz="1400" dirty="0">
+                <a:hlinkClick r:id="rId2"/>
+              </a:rPr>
+              <a:t>https://</a:t>
+            </a:r>
+            <a:r>
+              <a:rPr lang="en-US" sz="1400" dirty="0" err="1">
+                <a:hlinkClick r:id="rId2"/>
+              </a:rPr>
+              <a:t>www.htproducts.com</a:t>
+            </a:r>
+            <a:r>
+              <a:rPr lang="en-US" sz="1400" dirty="0">
+                <a:hlinkClick r:id="rId2"/>
+              </a:rPr>
+              <a:t>/</a:t>
+            </a:r>
+            <a:r>
+              <a:rPr lang="en-US" sz="1400" dirty="0" err="1">
+                <a:hlinkClick r:id="rId2"/>
+              </a:rPr>
+              <a:t>superstor</a:t>
+            </a:r>
+            <a:r>
+              <a:rPr lang="en-US" sz="1400" dirty="0">
+                <a:hlinkClick r:id="rId2"/>
+              </a:rPr>
+              <a:t>-ultra-</a:t>
+            </a:r>
+            <a:r>
+              <a:rPr lang="en-US" sz="1400" dirty="0" err="1">
+                <a:hlinkClick r:id="rId2"/>
+              </a:rPr>
+              <a:t>waterheater.html</a:t>
+            </a:r>
+            <a:endParaRPr lang="en-US" sz="1400" dirty="0"/>
+          </a:p>
+        </p:txBody>
+      </p:sp>
+      <p:pic>
+        <p:nvPicPr>
+          <p:cNvPr id="1030" name="Picture 6" descr="SuperStor Ultra Indirect Water Heater">
+            <a:extLst>
+              <a:ext uri="{FF2B5EF4-FFF2-40B4-BE49-F238E27FC236}">
+                <a16:creationId xmlns:a16="http://schemas.microsoft.com/office/drawing/2014/main" id="{6C62D66D-D906-1A62-8AF0-234FADBFEE9B}"/>
+              </a:ext>
+            </a:extLst>
+          </p:cNvPr>
+          <p:cNvPicPr>
+            <a:picLocks noChangeAspect="1" noChangeArrowheads="1"/>
+          </p:cNvPicPr>
+          <p:nvPr/>
+        </p:nvPicPr>
+        <p:blipFill>
+          <a:blip r:embed="rId3" cstate="email">
+            <a:extLst>
+              <a:ext uri="{28A0092B-C50C-407E-A947-70E740481C1C}">
+                <a14:useLocalDpi xmlns:a14="http://schemas.microsoft.com/office/drawing/2010/main"/>
+              </a:ext>
+            </a:extLst>
+          </a:blip>
+          <a:srcRect/>
+          <a:stretch>
+            <a:fillRect/>
+          </a:stretch>
+        </p:blipFill>
+        <p:spPr bwMode="auto">
+          <a:xfrm>
+            <a:off x="533860" y="1106424"/>
+            <a:ext cx="2216579" cy="3282696"/>
+          </a:xfrm>
+          <a:prstGeom prst="rect">
+            <a:avLst/>
+          </a:prstGeom>
+          <a:noFill/>
+          <a:extLst>
+            <a:ext uri="{909E8E84-426E-40DD-AFC4-6F175D3DCCD1}">
+              <a14:hiddenFill xmlns:a14="http://schemas.microsoft.com/office/drawing/2010/main">
+                <a:solidFill>
+                  <a:srgbClr val="FFFFFF"/>
+                </a:solidFill>
+              </a14:hiddenFill>
+            </a:ext>
+          </a:extLst>
+        </p:spPr>
+      </p:pic>
+      <p:sp>
+        <p:nvSpPr>
+          <p:cNvPr id="8" name="TextBox 7">
+            <a:extLst>
+              <a:ext uri="{FF2B5EF4-FFF2-40B4-BE49-F238E27FC236}">
+                <a16:creationId xmlns:a16="http://schemas.microsoft.com/office/drawing/2014/main" id="{4D2B4937-73A4-B5BA-6C95-5CFD5A83D070}"/>
+              </a:ext>
+            </a:extLst>
+          </p:cNvPr>
+          <p:cNvSpPr txBox="1"/>
+          <p:nvPr/>
+        </p:nvSpPr>
+        <p:spPr>
+          <a:xfrm>
+            <a:off x="533860" y="4491703"/>
+            <a:ext cx="2343150" cy="523220"/>
+          </a:xfrm>
+          <a:prstGeom prst="rect">
+            <a:avLst/>
+          </a:prstGeom>
+          <a:noFill/>
+        </p:spPr>
+        <p:txBody>
+          <a:bodyPr wrap="square">
+            <a:spAutoFit/>
+          </a:bodyPr>
+          <a:lstStyle/>
+          <a:p>
+            <a:r>
+              <a:rPr lang="en-US" sz="1400" b="0" i="0" dirty="0" err="1">
+                <a:solidFill>
+                  <a:srgbClr val="001D35"/>
+                </a:solidFill>
+                <a:effectLst/>
+                <a:latin typeface="Google Sans"/>
+              </a:rPr>
+              <a:t>SuperStor</a:t>
+            </a:r>
+            <a:r>
+              <a:rPr lang="en-US" sz="1400" b="0" i="0" dirty="0">
+                <a:solidFill>
+                  <a:srgbClr val="001D35"/>
+                </a:solidFill>
+                <a:effectLst/>
+                <a:latin typeface="Google Sans"/>
+              </a:rPr>
+              <a:t> ULTRA </a:t>
+            </a:r>
+          </a:p>
+          <a:p>
+            <a:r>
+              <a:rPr lang="en-US" sz="1400" b="0" i="0" dirty="0">
+                <a:solidFill>
+                  <a:srgbClr val="001D35"/>
+                </a:solidFill>
+                <a:effectLst/>
+                <a:latin typeface="Google Sans"/>
+              </a:rPr>
+              <a:t>316 Liters</a:t>
+            </a:r>
+            <a:endParaRPr lang="en-US" sz="1400" dirty="0">
+              <a:solidFill>
+                <a:srgbClr val="001D35"/>
+              </a:solidFill>
+              <a:latin typeface="Google Sans"/>
+            </a:endParaRPr>
+          </a:p>
+        </p:txBody>
+      </p:sp>
+      <p:pic>
+        <p:nvPicPr>
+          <p:cNvPr id="1032" name="Picture 8" descr="Inside the SuperStor Ultra">
+            <a:extLst>
+              <a:ext uri="{FF2B5EF4-FFF2-40B4-BE49-F238E27FC236}">
+                <a16:creationId xmlns:a16="http://schemas.microsoft.com/office/drawing/2014/main" id="{986B8B3B-0952-1366-6FC4-4CC1D5DFCE46}"/>
+              </a:ext>
+            </a:extLst>
+          </p:cNvPr>
+          <p:cNvPicPr>
+            <a:picLocks noChangeAspect="1" noChangeArrowheads="1"/>
+          </p:cNvPicPr>
+          <p:nvPr/>
+        </p:nvPicPr>
+        <p:blipFill>
+          <a:blip r:embed="rId4" cstate="email">
+            <a:extLst>
+              <a:ext uri="{28A0092B-C50C-407E-A947-70E740481C1C}">
+                <a14:useLocalDpi xmlns:a14="http://schemas.microsoft.com/office/drawing/2010/main"/>
+              </a:ext>
+            </a:extLst>
+          </a:blip>
+          <a:srcRect/>
+          <a:stretch>
+            <a:fillRect/>
+          </a:stretch>
+        </p:blipFill>
+        <p:spPr bwMode="auto">
+          <a:xfrm>
+            <a:off x="4613142" y="1263208"/>
+            <a:ext cx="4099571" cy="3794760"/>
+          </a:xfrm>
+          <a:prstGeom prst="rect">
+            <a:avLst/>
+          </a:prstGeom>
+          <a:noFill/>
+          <a:extLst>
+            <a:ext uri="{909E8E84-426E-40DD-AFC4-6F175D3DCCD1}">
+              <a14:hiddenFill xmlns:a14="http://schemas.microsoft.com/office/drawing/2010/main">
+                <a:solidFill>
+                  <a:srgbClr val="FFFFFF"/>
+                </a:solidFill>
+              </a14:hiddenFill>
+            </a:ext>
+          </a:extLst>
+        </p:spPr>
+      </p:pic>
+    </p:spTree>
+    <p:extLst>
+      <p:ext uri="{BB962C8B-B14F-4D97-AF65-F5344CB8AC3E}">
+        <p14:creationId xmlns:p14="http://schemas.microsoft.com/office/powerpoint/2010/main" val="3942110829"/>
+      </p:ext>
+    </p:extLst>
+  </p:cSld>
+  <p:clrMapOvr>
+    <a:masterClrMapping/>
+  </p:clrMapOvr>
+</p:sld>
+</file>
+
 <file path=ppt/slides/slide2.xml><?xml version="1.0" encoding="utf-8"?>
 <p:sld xmlns:a="http://schemas.openxmlformats.org/drawingml/2006/main" xmlns:r="http://schemas.openxmlformats.org/officeDocument/2006/relationships" xmlns:p="http://schemas.openxmlformats.org/presentationml/2006/main">
   <p:cSld>
@@ -15932,7 +16317,7 @@
         <p:spPr>
           <a:xfrm>
             <a:off x="0" y="0"/>
-            <a:ext cx="3101009" cy="523220"/>
+            <a:ext cx="4974956" cy="646331"/>
           </a:xfrm>
           <a:prstGeom prst="rect">
             <a:avLst/>
@@ -15946,9 +16331,22 @@
           <a:lstStyle/>
           <a:p>
             <a:r>
-              <a:rPr lang="en-US" sz="2800" b="1" dirty="0"/>
-              <a:t>Peerless Boiler</a:t>
-            </a:r>
+              <a:rPr lang="en-US" b="1" dirty="0"/>
+              <a:t>Peerless Boiler WB-3 Series (WBV-110-WPD ?)</a:t>
+            </a:r>
+          </a:p>
+          <a:p>
+            <a:r>
+              <a:rPr lang="en-US" b="0" i="0" dirty="0">
+                <a:solidFill>
+                  <a:srgbClr val="001D35"/>
+                </a:solidFill>
+                <a:effectLst/>
+                <a:latin typeface="Google Sans"/>
+              </a:rPr>
+              <a:t>residential, oil-fired boilers</a:t>
+            </a:r>
+            <a:endParaRPr lang="en-US" b="1" dirty="0"/>
           </a:p>
         </p:txBody>
       </p:sp>
@@ -16108,8 +16506,8 @@
         </p:nvSpPr>
         <p:spPr>
           <a:xfrm>
-            <a:off x="0" y="523220"/>
-            <a:ext cx="3951426" cy="600164"/>
+            <a:off x="116102" y="601727"/>
+            <a:ext cx="3672288" cy="769441"/>
           </a:xfrm>
           <a:prstGeom prst="rect">
             <a:avLst/>
@@ -16152,7 +16550,19 @@
               <a:rPr lang="en-US" sz="1100" dirty="0" err="1">
                 <a:hlinkClick r:id="rId7"/>
               </a:rPr>
-              <a:t>www.youtube.com</a:t>
+              <a:t>www.peerlessboilers.com</a:t>
+            </a:r>
+            <a:r>
+              <a:rPr lang="en-US" sz="1100" dirty="0">
+                <a:hlinkClick r:id="rId7"/>
+              </a:rPr>
+              <a:t>/products/series-</a:t>
+            </a:r>
+            <a:r>
+              <a:rPr lang="en-US" sz="1100" dirty="0" err="1">
+                <a:hlinkClick r:id="rId7"/>
+              </a:rPr>
+              <a:t>wbv</a:t>
             </a:r>
             <a:r>
               <a:rPr lang="en-US" sz="1100" dirty="0">
@@ -16161,18 +16571,9 @@
               <a:t>/</a:t>
             </a:r>
             <a:r>
-              <a:rPr lang="en-US" sz="1100" dirty="0" err="1">
-                <a:hlinkClick r:id="rId7"/>
-              </a:rPr>
-              <a:t>watch?v</a:t>
-            </a:r>
-            <a:r>
-              <a:rPr lang="en-US" sz="1100" dirty="0">
-                <a:hlinkClick r:id="rId7"/>
-              </a:rPr>
-              <a:t>=5GbXgEYw5TE</a:t>
-            </a:r>
-            <a:endParaRPr lang="en-US" sz="1100" dirty="0"/>
+              <a:rPr lang="en-US" sz="1100" dirty="0"/>
+              <a:t> </a:t>
+            </a:r>
           </a:p>
           <a:p>
             <a:pPr marL="171450" indent="-171450">
@@ -16180,8 +16581,45 @@
               <a:buChar char="•"/>
             </a:pPr>
             <a:r>
+              <a:rPr lang="en-US" sz="1100" dirty="0">
+                <a:hlinkClick r:id="rId8"/>
+              </a:rPr>
+              <a:t>https://</a:t>
+            </a:r>
+            <a:r>
+              <a:rPr lang="en-US" sz="1100" dirty="0" err="1">
+                <a:hlinkClick r:id="rId8"/>
+              </a:rPr>
+              <a:t>www.youtube.com</a:t>
+            </a:r>
+            <a:r>
+              <a:rPr lang="en-US" sz="1100" dirty="0">
+                <a:hlinkClick r:id="rId8"/>
+              </a:rPr>
+              <a:t>/</a:t>
+            </a:r>
+            <a:r>
+              <a:rPr lang="en-US" sz="1100" dirty="0" err="1">
+                <a:hlinkClick r:id="rId8"/>
+              </a:rPr>
+              <a:t>watch?v</a:t>
+            </a:r>
+            <a:r>
+              <a:rPr lang="en-US" sz="1100" dirty="0">
+                <a:hlinkClick r:id="rId8"/>
+              </a:rPr>
+              <a:t>=5GbXgEYw5TE</a:t>
+            </a:r>
+            <a:endParaRPr lang="en-US" sz="1100" dirty="0"/>
+          </a:p>
+          <a:p>
+            <a:pPr marL="171450" indent="-171450">
+              <a:buFont typeface="Arial" panose="020B0604020202020204" pitchFamily="34" charset="0"/>
+              <a:buChar char="•"/>
+            </a:pPr>
+            <a:r>
               <a:rPr lang="en-US" sz="1100" dirty="0"/>
-              <a:t>xxx</a:t>
+              <a:t>12-18 Gal of water </a:t>
             </a:r>
           </a:p>
         </p:txBody>
@@ -16287,7 +16725,7 @@
             </a:r>
             <a:r>
               <a:rPr lang="en-US" sz="1200" dirty="0">
-                <a:hlinkClick r:id="rId8"/>
+                <a:hlinkClick r:id="rId9"/>
               </a:rPr>
               <a:t>https://www.beckettcorp.com/product/genisys-7505-oil-burner-control/</a:t>
             </a:r>
@@ -16411,7 +16849,7 @@
           <p:nvPr/>
         </p:nvPicPr>
         <p:blipFill>
-          <a:blip r:embed="rId9" cstate="email">
+          <a:blip r:embed="rId10" cstate="email">
             <a:extLst>
               <a:ext uri="{28A0092B-C50C-407E-A947-70E740481C1C}">
                 <a14:useLocalDpi xmlns:a14="http://schemas.microsoft.com/office/drawing/2010/main"/>
@@ -16447,7 +16885,7 @@
           <p:nvPr/>
         </p:nvPicPr>
         <p:blipFill>
-          <a:blip r:embed="rId10" cstate="email">
+          <a:blip r:embed="rId11" cstate="email">
             <a:extLst>
               <a:ext uri="{28A0092B-C50C-407E-A947-70E740481C1C}">
                 <a14:useLocalDpi xmlns:a14="http://schemas.microsoft.com/office/drawing/2010/main"/>
@@ -16482,6 +16920,203 @@
 </file>
 
 <file path=ppt/slides/slide4.xml><?xml version="1.0" encoding="utf-8"?>
+<p:sld xmlns:a="http://schemas.openxmlformats.org/drawingml/2006/main" xmlns:r="http://schemas.openxmlformats.org/officeDocument/2006/relationships" xmlns:p="http://schemas.openxmlformats.org/presentationml/2006/main">
+  <p:cSld>
+    <p:spTree>
+      <p:nvGrpSpPr>
+        <p:cNvPr id="1" name=""/>
+        <p:cNvGrpSpPr/>
+        <p:nvPr/>
+      </p:nvGrpSpPr>
+      <p:grpSpPr>
+        <a:xfrm>
+          <a:off x="0" y="0"/>
+          <a:ext cx="0" cy="0"/>
+          <a:chOff x="0" y="0"/>
+          <a:chExt cx="0" cy="0"/>
+        </a:xfrm>
+      </p:grpSpPr>
+      <p:sp>
+        <p:nvSpPr>
+          <p:cNvPr id="4" name="TextBox 3">
+            <a:extLst>
+              <a:ext uri="{FF2B5EF4-FFF2-40B4-BE49-F238E27FC236}">
+                <a16:creationId xmlns:a16="http://schemas.microsoft.com/office/drawing/2014/main" id="{974AE441-BFEF-F220-CAC7-D27430C3F116}"/>
+              </a:ext>
+            </a:extLst>
+          </p:cNvPr>
+          <p:cNvSpPr txBox="1"/>
+          <p:nvPr/>
+        </p:nvSpPr>
+        <p:spPr>
+          <a:xfrm>
+            <a:off x="152400" y="99060"/>
+            <a:ext cx="914400" cy="381000"/>
+          </a:xfrm>
+          <a:prstGeom prst="rect">
+            <a:avLst/>
+          </a:prstGeom>
+          <a:noFill/>
+        </p:spPr>
+        <p:txBody>
+          <a:bodyPr wrap="square" rtlCol="0">
+            <a:spAutoFit/>
+          </a:bodyPr>
+          <a:lstStyle/>
+          <a:p>
+            <a:r>
+              <a:rPr lang="en-US" dirty="0"/>
+              <a:t>Boiler</a:t>
+            </a:r>
+          </a:p>
+        </p:txBody>
+      </p:sp>
+      <p:pic>
+        <p:nvPicPr>
+          <p:cNvPr id="5" name="Picture 4">
+            <a:extLst>
+              <a:ext uri="{FF2B5EF4-FFF2-40B4-BE49-F238E27FC236}">
+                <a16:creationId xmlns:a16="http://schemas.microsoft.com/office/drawing/2014/main" id="{E57E6FE0-5AEB-C665-309D-6FCA2450C55C}"/>
+              </a:ext>
+            </a:extLst>
+          </p:cNvPr>
+          <p:cNvPicPr>
+            <a:picLocks noChangeAspect="1"/>
+          </p:cNvPicPr>
+          <p:nvPr/>
+        </p:nvPicPr>
+        <p:blipFill rotWithShape="1">
+          <a:blip r:embed="rId2" cstate="email">
+            <a:extLst>
+              <a:ext uri="{28A0092B-C50C-407E-A947-70E740481C1C}">
+                <a14:useLocalDpi xmlns:a14="http://schemas.microsoft.com/office/drawing/2010/main"/>
+              </a:ext>
+            </a:extLst>
+          </a:blip>
+          <a:srcRect/>
+          <a:stretch/>
+        </p:blipFill>
+        <p:spPr>
+          <a:xfrm>
+            <a:off x="1069848" y="71628"/>
+            <a:ext cx="5943600" cy="4754880"/>
+          </a:xfrm>
+          <a:prstGeom prst="rect">
+            <a:avLst/>
+          </a:prstGeom>
+        </p:spPr>
+      </p:pic>
+      <p:pic>
+        <p:nvPicPr>
+          <p:cNvPr id="6" name="Picture 5">
+            <a:extLst>
+              <a:ext uri="{FF2B5EF4-FFF2-40B4-BE49-F238E27FC236}">
+                <a16:creationId xmlns:a16="http://schemas.microsoft.com/office/drawing/2014/main" id="{82B8BCAA-E862-8586-60B7-78BFD939EB36}"/>
+              </a:ext>
+            </a:extLst>
+          </p:cNvPr>
+          <p:cNvPicPr>
+            <a:picLocks noChangeAspect="1"/>
+          </p:cNvPicPr>
+          <p:nvPr/>
+        </p:nvPicPr>
+        <p:blipFill>
+          <a:blip r:embed="rId3" cstate="email">
+            <a:extLst>
+              <a:ext uri="{28A0092B-C50C-407E-A947-70E740481C1C}">
+                <a14:useLocalDpi xmlns:a14="http://schemas.microsoft.com/office/drawing/2010/main"/>
+              </a:ext>
+            </a:extLst>
+          </a:blip>
+          <a:stretch>
+            <a:fillRect/>
+          </a:stretch>
+        </p:blipFill>
+        <p:spPr>
+          <a:xfrm>
+            <a:off x="7090540" y="78057"/>
+            <a:ext cx="5079158" cy="5542156"/>
+          </a:xfrm>
+          <a:prstGeom prst="rect">
+            <a:avLst/>
+          </a:prstGeom>
+        </p:spPr>
+      </p:pic>
+      <p:sp>
+        <p:nvSpPr>
+          <p:cNvPr id="8" name="TextBox 7">
+            <a:extLst>
+              <a:ext uri="{FF2B5EF4-FFF2-40B4-BE49-F238E27FC236}">
+                <a16:creationId xmlns:a16="http://schemas.microsoft.com/office/drawing/2014/main" id="{95296587-6C3F-D106-1BDC-1369940C4F32}"/>
+              </a:ext>
+            </a:extLst>
+          </p:cNvPr>
+          <p:cNvSpPr txBox="1"/>
+          <p:nvPr/>
+        </p:nvSpPr>
+        <p:spPr>
+          <a:xfrm>
+            <a:off x="152400" y="5257800"/>
+            <a:ext cx="4666159" cy="523220"/>
+          </a:xfrm>
+          <a:prstGeom prst="rect">
+            <a:avLst/>
+          </a:prstGeom>
+          <a:noFill/>
+        </p:spPr>
+        <p:txBody>
+          <a:bodyPr wrap="square">
+            <a:spAutoFit/>
+          </a:bodyPr>
+          <a:lstStyle/>
+          <a:p>
+            <a:pPr marL="171450" indent="-171450">
+              <a:buFont typeface="Arial" panose="020B0604020202020204" pitchFamily="34" charset="0"/>
+              <a:buChar char="•"/>
+            </a:pPr>
+            <a:r>
+              <a:rPr lang="en-US" sz="1400" dirty="0">
+                <a:hlinkClick r:id="rId4"/>
+              </a:rPr>
+              <a:t>https://www.peerlessboilers.com</a:t>
+            </a:r>
+            <a:r>
+              <a:rPr lang="en-US" sz="1400" dirty="0"/>
+              <a:t> </a:t>
+            </a:r>
+          </a:p>
+          <a:p>
+            <a:pPr marL="171450" indent="-171450">
+              <a:buFont typeface="Arial" panose="020B0604020202020204" pitchFamily="34" charset="0"/>
+              <a:buChar char="•"/>
+            </a:pPr>
+            <a:r>
+              <a:rPr lang="en-US" sz="1400" dirty="0">
+                <a:hlinkClick r:id="rId5"/>
+              </a:rPr>
+              <a:t>https://www.peerlessboilers.com/products/series-wbv/</a:t>
+            </a:r>
+            <a:r>
+              <a:rPr lang="en-US" sz="1400" dirty="0"/>
+              <a:t> </a:t>
+            </a:r>
+          </a:p>
+        </p:txBody>
+      </p:sp>
+    </p:spTree>
+    <p:extLst>
+      <p:ext uri="{BB962C8B-B14F-4D97-AF65-F5344CB8AC3E}">
+        <p14:creationId xmlns:p14="http://schemas.microsoft.com/office/powerpoint/2010/main" val="2768605040"/>
+      </p:ext>
+    </p:extLst>
+  </p:cSld>
+  <p:clrMapOvr>
+    <a:masterClrMapping/>
+  </p:clrMapOvr>
+</p:sld>
+</file>
+
+<file path=ppt/slides/slide5.xml><?xml version="1.0" encoding="utf-8"?>
 <p:sld xmlns:a="http://schemas.openxmlformats.org/drawingml/2006/main" xmlns:r="http://schemas.openxmlformats.org/officeDocument/2006/relationships" xmlns:p="http://schemas.openxmlformats.org/presentationml/2006/main">
   <p:cSld>
     <p:spTree>
@@ -16673,7 +17308,7 @@
 </p:sld>
 </file>
 
-<file path=ppt/slides/slide5.xml><?xml version="1.0" encoding="utf-8"?>
+<file path=ppt/slides/slide6.xml><?xml version="1.0" encoding="utf-8"?>
 <p:sld xmlns:a="http://schemas.openxmlformats.org/drawingml/2006/main" xmlns:r="http://schemas.openxmlformats.org/officeDocument/2006/relationships" xmlns:p="http://schemas.openxmlformats.org/presentationml/2006/main">
   <p:cSld>
     <p:spTree>
@@ -17004,7 +17639,7 @@
 </p:sld>
 </file>
 
-<file path=ppt/slides/slide6.xml><?xml version="1.0" encoding="utf-8"?>
+<file path=ppt/slides/slide7.xml><?xml version="1.0" encoding="utf-8"?>
 <p:sld xmlns:a="http://schemas.openxmlformats.org/drawingml/2006/main" xmlns:r="http://schemas.openxmlformats.org/officeDocument/2006/relationships" xmlns:p="http://schemas.openxmlformats.org/presentationml/2006/main">
   <p:cSld>
     <p:spTree>
@@ -17733,7 +18368,7 @@
 </p:sld>
 </file>
 
-<file path=ppt/slides/slide7.xml><?xml version="1.0" encoding="utf-8"?>
+<file path=ppt/slides/slide8.xml><?xml version="1.0" encoding="utf-8"?>
 <p:sld xmlns:a="http://schemas.openxmlformats.org/drawingml/2006/main" xmlns:r="http://schemas.openxmlformats.org/officeDocument/2006/relationships" xmlns:p="http://schemas.openxmlformats.org/presentationml/2006/main">
   <p:cSld>
     <p:spTree>
@@ -18970,7 +19605,7 @@
 </p:sld>
 </file>
 
-<file path=ppt/slides/slide8.xml><?xml version="1.0" encoding="utf-8"?>
+<file path=ppt/slides/slide9.xml><?xml version="1.0" encoding="utf-8"?>
 <p:sld xmlns:a="http://schemas.openxmlformats.org/drawingml/2006/main" xmlns:r="http://schemas.openxmlformats.org/officeDocument/2006/relationships" xmlns:p="http://schemas.openxmlformats.org/presentationml/2006/main">
   <p:cSld>
     <p:spTree>

--- a/oil_boiler_heating.pptx
+++ b/oil_boiler_heating.pptx
@@ -5,7 +5,7 @@
     <p:sldMasterId id="2147483648" r:id="rId1"/>
   </p:sldMasterIdLst>
   <p:notesMasterIdLst>
-    <p:notesMasterId r:id="rId12"/>
+    <p:notesMasterId r:id="rId13"/>
   </p:notesMasterIdLst>
   <p:sldIdLst>
     <p:sldId id="256" r:id="rId2"/>
@@ -17,7 +17,8 @@
     <p:sldId id="260" r:id="rId8"/>
     <p:sldId id="262" r:id="rId9"/>
     <p:sldId id="263" r:id="rId10"/>
-    <p:sldId id="264" r:id="rId11"/>
+    <p:sldId id="266" r:id="rId11"/>
+    <p:sldId id="264" r:id="rId12"/>
   </p:sldIdLst>
   <p:sldSz cx="12192000" cy="6858000"/>
   <p:notesSz cx="6858000" cy="9144000"/>
@@ -206,7 +207,7 @@
           <a:p>
             <a:fld id="{41ADE972-A30E-EB4D-8E6E-AA4C5D685F81}" type="datetimeFigureOut">
               <a:rPr lang="en-US" smtClean="0"/>
-              <a:t>12/28/23</a:t>
+              <a:t>12/29/23</a:t>
             </a:fld>
             <a:endParaRPr lang="en-US"/>
           </a:p>
@@ -787,7 +788,7 @@
           <a:lstStyle/>
           <a:p>
             <a:fld id="{5F491023-0B0A-7041-9F06-D25A50EF063B}" type="datetimeFigureOut">
-              <a:t>12/28/23</a:t>
+              <a:t>12/29/23</a:t>
             </a:fld>
             <a:endParaRPr lang="en-US"/>
           </a:p>
@@ -983,7 +984,7 @@
           <a:lstStyle/>
           <a:p>
             <a:fld id="{5F491023-0B0A-7041-9F06-D25A50EF063B}" type="datetimeFigureOut">
-              <a:t>12/28/23</a:t>
+              <a:t>12/29/23</a:t>
             </a:fld>
             <a:endParaRPr lang="en-US"/>
           </a:p>
@@ -1189,7 +1190,7 @@
           <a:lstStyle/>
           <a:p>
             <a:fld id="{5F491023-0B0A-7041-9F06-D25A50EF063B}" type="datetimeFigureOut">
-              <a:t>12/28/23</a:t>
+              <a:t>12/29/23</a:t>
             </a:fld>
             <a:endParaRPr lang="en-US"/>
           </a:p>
@@ -1385,7 +1386,7 @@
           <a:lstStyle/>
           <a:p>
             <a:fld id="{5F491023-0B0A-7041-9F06-D25A50EF063B}" type="datetimeFigureOut">
-              <a:t>12/28/23</a:t>
+              <a:t>12/29/23</a:t>
             </a:fld>
             <a:endParaRPr lang="en-US"/>
           </a:p>
@@ -1658,7 +1659,7 @@
           <a:lstStyle/>
           <a:p>
             <a:fld id="{5F491023-0B0A-7041-9F06-D25A50EF063B}" type="datetimeFigureOut">
-              <a:t>12/28/23</a:t>
+              <a:t>12/29/23</a:t>
             </a:fld>
             <a:endParaRPr lang="en-US"/>
           </a:p>
@@ -1921,7 +1922,7 @@
           <a:lstStyle/>
           <a:p>
             <a:fld id="{5F491023-0B0A-7041-9F06-D25A50EF063B}" type="datetimeFigureOut">
-              <a:t>12/28/23</a:t>
+              <a:t>12/29/23</a:t>
             </a:fld>
             <a:endParaRPr lang="en-US"/>
           </a:p>
@@ -2331,7 +2332,7 @@
           <a:lstStyle/>
           <a:p>
             <a:fld id="{5F491023-0B0A-7041-9F06-D25A50EF063B}" type="datetimeFigureOut">
-              <a:t>12/28/23</a:t>
+              <a:t>12/29/23</a:t>
             </a:fld>
             <a:endParaRPr lang="en-US"/>
           </a:p>
@@ -2470,7 +2471,7 @@
           <a:lstStyle/>
           <a:p>
             <a:fld id="{5F491023-0B0A-7041-9F06-D25A50EF063B}" type="datetimeFigureOut">
-              <a:t>12/28/23</a:t>
+              <a:t>12/29/23</a:t>
             </a:fld>
             <a:endParaRPr lang="en-US"/>
           </a:p>
@@ -2581,7 +2582,7 @@
           <a:lstStyle/>
           <a:p>
             <a:fld id="{5F491023-0B0A-7041-9F06-D25A50EF063B}" type="datetimeFigureOut">
-              <a:t>12/28/23</a:t>
+              <a:t>12/29/23</a:t>
             </a:fld>
             <a:endParaRPr lang="en-US"/>
           </a:p>
@@ -2890,7 +2891,7 @@
           <a:lstStyle/>
           <a:p>
             <a:fld id="{5F491023-0B0A-7041-9F06-D25A50EF063B}" type="datetimeFigureOut">
-              <a:t>12/28/23</a:t>
+              <a:t>12/29/23</a:t>
             </a:fld>
             <a:endParaRPr lang="en-US"/>
           </a:p>
@@ -3176,7 +3177,7 @@
           <a:lstStyle/>
           <a:p>
             <a:fld id="{5F491023-0B0A-7041-9F06-D25A50EF063B}" type="datetimeFigureOut">
-              <a:t>12/28/23</a:t>
+              <a:t>12/29/23</a:t>
             </a:fld>
             <a:endParaRPr lang="en-US"/>
           </a:p>
@@ -3415,7 +3416,7 @@
           </a:lstStyle>
           <a:p>
             <a:fld id="{5F491023-0B0A-7041-9F06-D25A50EF063B}" type="datetimeFigureOut">
-              <a:t>12/28/23</a:t>
+              <a:t>12/29/23</a:t>
             </a:fld>
             <a:endParaRPr lang="en-US"/>
           </a:p>
@@ -4601,6 +4602,242 @@
           <a:chExt cx="0" cy="0"/>
         </a:xfrm>
       </p:grpSpPr>
+      <p:pic>
+        <p:nvPicPr>
+          <p:cNvPr id="1026" name="Picture 2" descr="How Is a Tank Type Gas Water Heater Designed? | Calentadores de agua,  Calefaccion solar, Calentador de agua solar">
+            <a:extLst>
+              <a:ext uri="{FF2B5EF4-FFF2-40B4-BE49-F238E27FC236}">
+                <a16:creationId xmlns:a16="http://schemas.microsoft.com/office/drawing/2014/main" id="{F8E81EA8-7C87-DCB7-B4DC-D4D9DF29C43B}"/>
+              </a:ext>
+            </a:extLst>
+          </p:cNvPr>
+          <p:cNvPicPr>
+            <a:picLocks noChangeAspect="1" noChangeArrowheads="1"/>
+          </p:cNvPicPr>
+          <p:nvPr/>
+        </p:nvPicPr>
+        <p:blipFill>
+          <a:blip r:embed="rId2" cstate="email">
+            <a:extLst>
+              <a:ext uri="{28A0092B-C50C-407E-A947-70E740481C1C}">
+                <a14:useLocalDpi xmlns:a14="http://schemas.microsoft.com/office/drawing/2010/main"/>
+              </a:ext>
+            </a:extLst>
+          </a:blip>
+          <a:srcRect/>
+          <a:stretch>
+            <a:fillRect/>
+          </a:stretch>
+        </p:blipFill>
+        <p:spPr bwMode="auto">
+          <a:xfrm>
+            <a:off x="3262746" y="862446"/>
+            <a:ext cx="3439392" cy="3439392"/>
+          </a:xfrm>
+          <a:prstGeom prst="rect">
+            <a:avLst/>
+          </a:prstGeom>
+          <a:noFill/>
+          <a:extLst>
+            <a:ext uri="{909E8E84-426E-40DD-AFC4-6F175D3DCCD1}">
+              <a14:hiddenFill xmlns:a14="http://schemas.microsoft.com/office/drawing/2010/main">
+                <a:solidFill>
+                  <a:srgbClr val="FFFFFF"/>
+                </a:solidFill>
+              </a14:hiddenFill>
+            </a:ext>
+          </a:extLst>
+        </p:spPr>
+      </p:pic>
+      <p:pic>
+        <p:nvPicPr>
+          <p:cNvPr id="4" name="Picture 3">
+            <a:extLst>
+              <a:ext uri="{FF2B5EF4-FFF2-40B4-BE49-F238E27FC236}">
+                <a16:creationId xmlns:a16="http://schemas.microsoft.com/office/drawing/2014/main" id="{EC0F309A-6048-BB75-AA88-C3EE61770687}"/>
+              </a:ext>
+            </a:extLst>
+          </p:cNvPr>
+          <p:cNvPicPr>
+            <a:picLocks noChangeAspect="1"/>
+          </p:cNvPicPr>
+          <p:nvPr/>
+        </p:nvPicPr>
+        <p:blipFill>
+          <a:blip r:embed="rId3" cstate="email">
+            <a:extLst>
+              <a:ext uri="{28A0092B-C50C-407E-A947-70E740481C1C}">
+                <a14:useLocalDpi xmlns:a14="http://schemas.microsoft.com/office/drawing/2010/main"/>
+              </a:ext>
+            </a:extLst>
+          </a:blip>
+          <a:stretch>
+            <a:fillRect/>
+          </a:stretch>
+        </p:blipFill>
+        <p:spPr>
+          <a:xfrm>
+            <a:off x="516555" y="724992"/>
+            <a:ext cx="1230668" cy="2828699"/>
+          </a:xfrm>
+          <a:prstGeom prst="rect">
+            <a:avLst/>
+          </a:prstGeom>
+        </p:spPr>
+      </p:pic>
+      <p:sp>
+        <p:nvSpPr>
+          <p:cNvPr id="6" name="TextBox 5">
+            <a:extLst>
+              <a:ext uri="{FF2B5EF4-FFF2-40B4-BE49-F238E27FC236}">
+                <a16:creationId xmlns:a16="http://schemas.microsoft.com/office/drawing/2014/main" id="{DF158EAB-7252-335F-36B9-A0C2B3F785EB}"/>
+              </a:ext>
+            </a:extLst>
+          </p:cNvPr>
+          <p:cNvSpPr txBox="1"/>
+          <p:nvPr/>
+        </p:nvSpPr>
+        <p:spPr>
+          <a:xfrm>
+            <a:off x="110838" y="78661"/>
+            <a:ext cx="3151908" cy="646331"/>
+          </a:xfrm>
+          <a:prstGeom prst="rect">
+            <a:avLst/>
+          </a:prstGeom>
+          <a:noFill/>
+        </p:spPr>
+        <p:txBody>
+          <a:bodyPr wrap="square">
+            <a:spAutoFit/>
+          </a:bodyPr>
+          <a:lstStyle/>
+          <a:p>
+            <a:r>
+              <a:rPr lang="en-US" dirty="0"/>
+              <a:t>electric tank water heaters</a:t>
+            </a:r>
+          </a:p>
+          <a:p>
+            <a:r>
+              <a:rPr lang="en-US" dirty="0"/>
+              <a:t>at home depot ~ 50 gal, ~$500</a:t>
+            </a:r>
+          </a:p>
+        </p:txBody>
+      </p:sp>
+      <p:sp>
+        <p:nvSpPr>
+          <p:cNvPr id="7" name="TextBox 6">
+            <a:extLst>
+              <a:ext uri="{FF2B5EF4-FFF2-40B4-BE49-F238E27FC236}">
+                <a16:creationId xmlns:a16="http://schemas.microsoft.com/office/drawing/2014/main" id="{BF96B222-3A8F-E439-70E4-2EDF0FAA43D9}"/>
+              </a:ext>
+            </a:extLst>
+          </p:cNvPr>
+          <p:cNvSpPr txBox="1"/>
+          <p:nvPr/>
+        </p:nvSpPr>
+        <p:spPr>
+          <a:xfrm>
+            <a:off x="3903519" y="217160"/>
+            <a:ext cx="2497281" cy="369332"/>
+          </a:xfrm>
+          <a:prstGeom prst="rect">
+            <a:avLst/>
+          </a:prstGeom>
+          <a:noFill/>
+        </p:spPr>
+        <p:txBody>
+          <a:bodyPr wrap="square">
+            <a:spAutoFit/>
+          </a:bodyPr>
+          <a:lstStyle/>
+          <a:p>
+            <a:r>
+              <a:rPr lang="en-US" dirty="0"/>
+              <a:t>gas tank water heater</a:t>
+            </a:r>
+          </a:p>
+        </p:txBody>
+      </p:sp>
+      <p:sp>
+        <p:nvSpPr>
+          <p:cNvPr id="8" name="TextBox 7">
+            <a:extLst>
+              <a:ext uri="{FF2B5EF4-FFF2-40B4-BE49-F238E27FC236}">
+                <a16:creationId xmlns:a16="http://schemas.microsoft.com/office/drawing/2014/main" id="{7095A64D-A9FB-D5D4-526E-A7C91431851A}"/>
+              </a:ext>
+            </a:extLst>
+          </p:cNvPr>
+          <p:cNvSpPr txBox="1"/>
+          <p:nvPr/>
+        </p:nvSpPr>
+        <p:spPr>
+          <a:xfrm>
+            <a:off x="7831283" y="206769"/>
+            <a:ext cx="3151909" cy="923330"/>
+          </a:xfrm>
+          <a:prstGeom prst="rect">
+            <a:avLst/>
+          </a:prstGeom>
+          <a:noFill/>
+        </p:spPr>
+        <p:txBody>
+          <a:bodyPr wrap="square">
+            <a:spAutoFit/>
+          </a:bodyPr>
+          <a:lstStyle/>
+          <a:p>
+            <a:r>
+              <a:rPr lang="en-US" dirty="0"/>
+              <a:t>combination / hybrid,</a:t>
+            </a:r>
+          </a:p>
+          <a:p>
+            <a:r>
+              <a:rPr lang="en-US" dirty="0"/>
+              <a:t>for example electric + gas</a:t>
+            </a:r>
+          </a:p>
+          <a:p>
+            <a:r>
+              <a:rPr lang="en-US" dirty="0"/>
+              <a:t>or electric + boiler</a:t>
+            </a:r>
+          </a:p>
+        </p:txBody>
+      </p:sp>
+    </p:spTree>
+    <p:extLst>
+      <p:ext uri="{BB962C8B-B14F-4D97-AF65-F5344CB8AC3E}">
+        <p14:creationId xmlns:p14="http://schemas.microsoft.com/office/powerpoint/2010/main" val="1435331558"/>
+      </p:ext>
+    </p:extLst>
+  </p:cSld>
+  <p:clrMapOvr>
+    <a:masterClrMapping/>
+  </p:clrMapOvr>
+</p:sld>
+</file>
+
+<file path=ppt/slides/slide11.xml><?xml version="1.0" encoding="utf-8"?>
+<p:sld xmlns:a="http://schemas.openxmlformats.org/drawingml/2006/main" xmlns:r="http://schemas.openxmlformats.org/officeDocument/2006/relationships" xmlns:p="http://schemas.openxmlformats.org/presentationml/2006/main">
+  <p:cSld>
+    <p:spTree>
+      <p:nvGrpSpPr>
+        <p:cNvPr id="1" name=""/>
+        <p:cNvGrpSpPr/>
+        <p:nvPr/>
+      </p:nvGrpSpPr>
+      <p:grpSpPr>
+        <a:xfrm>
+          <a:off x="0" y="0"/>
+          <a:ext cx="0" cy="0"/>
+          <a:chOff x="0" y="0"/>
+          <a:chExt cx="0" cy="0"/>
+        </a:xfrm>
+      </p:grpSpPr>
       <p:sp>
         <p:nvSpPr>
           <p:cNvPr id="3" name="TextBox 2">
@@ -4654,7 +4891,7 @@
         </p:nvSpPr>
         <p:spPr>
           <a:xfrm>
-            <a:off x="2082546" y="5346115"/>
+            <a:off x="1123188" y="5305341"/>
             <a:ext cx="2733294" cy="1169551"/>
           </a:xfrm>
           <a:prstGeom prst="rect">
@@ -4936,7 +5173,7 @@
         </p:blipFill>
         <p:spPr bwMode="auto">
           <a:xfrm>
-            <a:off x="4613142" y="1263208"/>
+            <a:off x="3226302" y="1243578"/>
             <a:ext cx="4099571" cy="3794760"/>
           </a:xfrm>
           <a:prstGeom prst="rect">
@@ -4952,6 +5189,77 @@
               </a14:hiddenFill>
             </a:ext>
           </a:extLst>
+        </p:spPr>
+      </p:pic>
+      <p:pic>
+        <p:nvPicPr>
+          <p:cNvPr id="4" name="Picture 3" descr="Diagram of a water heater&#10;&#10;Description automatically generated">
+            <a:extLst>
+              <a:ext uri="{FF2B5EF4-FFF2-40B4-BE49-F238E27FC236}">
+                <a16:creationId xmlns:a16="http://schemas.microsoft.com/office/drawing/2014/main" id="{AED8CC51-80E2-810E-ED97-0E37AC4C4196}"/>
+              </a:ext>
+            </a:extLst>
+          </p:cNvPr>
+          <p:cNvPicPr>
+            <a:picLocks noChangeAspect="1"/>
+          </p:cNvPicPr>
+          <p:nvPr/>
+        </p:nvPicPr>
+        <p:blipFill>
+          <a:blip r:embed="rId5" cstate="email">
+            <a:extLst>
+              <a:ext uri="{28A0092B-C50C-407E-A947-70E740481C1C}">
+                <a14:useLocalDpi xmlns:a14="http://schemas.microsoft.com/office/drawing/2010/main"/>
+              </a:ext>
+            </a:extLst>
+          </a:blip>
+          <a:stretch>
+            <a:fillRect/>
+          </a:stretch>
+        </p:blipFill>
+        <p:spPr>
+          <a:xfrm>
+            <a:off x="8610140" y="467205"/>
+            <a:ext cx="3048000" cy="2590800"/>
+          </a:xfrm>
+          <a:prstGeom prst="rect">
+            <a:avLst/>
+          </a:prstGeom>
+        </p:spPr>
+      </p:pic>
+      <p:pic>
+        <p:nvPicPr>
+          <p:cNvPr id="9" name="Picture 8" descr="A machine with pipes and valves&#10;&#10;Description automatically generated">
+            <a:extLst>
+              <a:ext uri="{FF2B5EF4-FFF2-40B4-BE49-F238E27FC236}">
+                <a16:creationId xmlns:a16="http://schemas.microsoft.com/office/drawing/2014/main" id="{7E497CE9-BC24-8DC1-9628-460E935A0E41}"/>
+              </a:ext>
+            </a:extLst>
+          </p:cNvPr>
+          <p:cNvPicPr>
+            <a:picLocks noChangeAspect="1"/>
+          </p:cNvPicPr>
+          <p:nvPr/>
+        </p:nvPicPr>
+        <p:blipFill rotWithShape="1">
+          <a:blip r:embed="rId6" cstate="email">
+            <a:extLst>
+              <a:ext uri="{28A0092B-C50C-407E-A947-70E740481C1C}">
+                <a14:useLocalDpi xmlns:a14="http://schemas.microsoft.com/office/drawing/2010/main"/>
+              </a:ext>
+            </a:extLst>
+          </a:blip>
+          <a:srcRect/>
+          <a:stretch/>
+        </p:blipFill>
+        <p:spPr>
+          <a:xfrm>
+            <a:off x="8610140" y="3239770"/>
+            <a:ext cx="3395821" cy="2953212"/>
+          </a:xfrm>
+          <a:prstGeom prst="rect">
+            <a:avLst/>
+          </a:prstGeom>
         </p:spPr>
       </p:pic>
     </p:spTree>
@@ -17056,8 +17364,8 @@
         </p:nvSpPr>
         <p:spPr>
           <a:xfrm>
-            <a:off x="152400" y="5257800"/>
-            <a:ext cx="4666159" cy="523220"/>
+            <a:off x="152400" y="4935679"/>
+            <a:ext cx="4666159" cy="1600438"/>
           </a:xfrm>
           <a:prstGeom prst="rect">
             <a:avLst/>
@@ -17099,6 +17407,33 @@
             <a:r>
               <a:rPr lang="en-US" sz="1400" dirty="0"/>
               <a:t> </a:t>
+            </a:r>
+          </a:p>
+          <a:p>
+            <a:endParaRPr lang="en-US" sz="1400" dirty="0"/>
+          </a:p>
+          <a:p>
+            <a:r>
+              <a:rPr lang="en-US" sz="1400" dirty="0"/>
+              <a:t>Water Pressure in kitchen sink – 40-60 PSI</a:t>
+            </a:r>
+          </a:p>
+          <a:p>
+            <a:r>
+              <a:rPr lang="en-US" sz="1400" dirty="0"/>
+              <a:t>Water Pressure in house heating should be low (15 psi ?)</a:t>
+            </a:r>
+          </a:p>
+          <a:p>
+            <a:r>
+              <a:rPr lang="en-US" sz="1400" dirty="0"/>
+              <a:t>Test – time to fill a 5 Gal bucket </a:t>
+            </a:r>
+          </a:p>
+          <a:p>
+            <a:r>
+              <a:rPr lang="en-US" sz="1400" dirty="0"/>
+              <a:t>(20 sec – excellent, 60 sec – fine)</a:t>
             </a:r>
           </a:p>
         </p:txBody>
